--- a/Development_D5/Workshop/D5-W05_Apply_Workshop_L09-L10_Leisure_Podcast_Then_Now_and_Next.pptx
+++ b/Development_D5/Workshop/D5-W05_Apply_Workshop_L09-L10_Leisure_Podcast_Then_Now_and_Next.pptx
@@ -9373,7 +9373,7 @@
                 <a:ea typeface="Amiri" pitchFamily="2" charset="-78"/>
                 <a:cs typeface="Amiri" pitchFamily="2" charset="-78"/>
               </a:rPr>
-              <a:t>سَـ</a:t>
+              <a:t>سَوْفَ</a:t>
             </a:r>
             <a:pPr algn="l" indent="0" marL="0">
               <a:buNone/>
